--- a/website/public/generated/The-BIG-PH01/05_samco_pco_31_slide_report.pptx
+++ b/website/public/generated/The-BIG-PH01/05_samco_pco_31_slide_report.pptx
@@ -3191,7 +3191,7 @@
               </a:defRPr>
             </a:pPr>
             <a:r>
-              <a:t>ROYA-BIG PROJECT PHASE01 (B1-4) | 30 data-driven control sections | 2026-08-13T19:10:43+00:00</a:t>
+              <a:t>ROYA-BIG PROJECT PHASE01 (B1-4) | 30 data-driven control sections | 2026-08-14T03:05:31+00:00</a:t>
             </a:r>
           </a:p>
         </p:txBody>

--- a/website/public/generated/The-BIG-PH01/05_samco_pco_31_slide_report.pptx
+++ b/website/public/generated/The-BIG-PH01/05_samco_pco_31_slide_report.pptx
@@ -3191,7 +3191,7 @@
               </a:defRPr>
             </a:pPr>
             <a:r>
-              <a:t>ROYA-BIG PROJECT PHASE01 (B1-4) | 30 data-driven control sections | 2026-08-14T03:05:31+00:00</a:t>
+              <a:t>ROYA-BIG PROJECT PHASE01 (B1-4) | 30 data-driven control sections | 2026-08-15T05:31:00+00:00</a:t>
             </a:r>
           </a:p>
         </p:txBody>
@@ -3369,7 +3369,7 @@
               </a:defRPr>
             </a:pPr>
             <a:r>
-              <a:t>evm: 01-data/import_templates/activity_master.csv (1363 rows)</a:t>
+              <a:t>evm: 01-data/import_templates/project_input_bundle.csv (1363 rows)</a:t>
             </a:r>
           </a:p>
         </p:txBody>
@@ -4821,7 +4821,7 @@
               </a:defRPr>
             </a:pPr>
             <a:r>
-              <a:t>evm: 01-data/import_templates/activity_master.csv (1363 rows)</a:t>
+              <a:t>evm: 01-data/import_templates/project_input_bundle.csv (1363 rows)</a:t>
             </a:r>
           </a:p>
         </p:txBody>
@@ -6285,7 +6285,7 @@
               </a:defRPr>
             </a:pPr>
             <a:r>
-              <a:t>payments: 02-delay_analysis/unified_tia_csv/08- payments.csv (8 rows)</a:t>
+              <a:t>payments: 01-data/import_templates/payments.csv (8 rows)</a:t>
             </a:r>
           </a:p>
         </p:txBody>
@@ -9153,7 +9153,7 @@
               </a:defRPr>
             </a:pPr>
             <a:r>
-              <a:t>activities: 01-data/import_templates/activity_master.csv (1363 rows)</a:t>
+              <a:t>activities: 01-data/import_templates/project_input_bundle.csv (1363 rows)</a:t>
             </a:r>
           </a:p>
         </p:txBody>
@@ -10596,7 +10596,7 @@
               </a:defRPr>
             </a:pPr>
             <a:r>
-              <a:t>activities: 01-data/import_templates/activity_master.csv (1363 rows)</a:t>
+              <a:t>activities: 01-data/import_templates/project_input_bundle.csv (1363 rows)</a:t>
             </a:r>
           </a:p>
         </p:txBody>
@@ -12039,7 +12039,7 @@
               </a:defRPr>
             </a:pPr>
             <a:r>
-              <a:t>activities: 01-data/import_templates/activity_master.csv (1363 rows)</a:t>
+              <a:t>activities: 01-data/import_templates/project_input_bundle.csv (1363 rows)</a:t>
             </a:r>
           </a:p>
         </p:txBody>
@@ -13494,7 +13494,7 @@
               </a:defRPr>
             </a:pPr>
             <a:r>
-              <a:t>activities: 01-data/import_templates/activity_master.csv (1363 rows)</a:t>
+              <a:t>activities: 01-data/import_templates/project_input_bundle.csv (1363 rows)</a:t>
             </a:r>
           </a:p>
         </p:txBody>
@@ -14943,7 +14943,7 @@
               </a:defRPr>
             </a:pPr>
             <a:r>
-              <a:t>activities: 01-data/import_templates/activity_master.csv (1363 rows)</a:t>
+              <a:t>activities: 01-data/import_templates/project_input_bundle.csv (1363 rows)</a:t>
             </a:r>
           </a:p>
         </p:txBody>
@@ -20015,7 +20015,7 @@
               </a:defRPr>
             </a:pPr>
             <a:r>
-              <a:t>activities: 01-data/import_templates/activity_master.csv (1363 rows)</a:t>
+              <a:t>activities: 01-data/import_templates/project_input_bundle.csv (1363 rows)</a:t>
             </a:r>
           </a:p>
           <a:p>
@@ -20027,7 +20027,7 @@
               </a:defRPr>
             </a:pPr>
             <a:r>
-              <a:t>progress: 01-data/import_templates/activity_master.csv (1363 rows)</a:t>
+              <a:t>progress: 01-data/import_templates/project_input_bundle.csv (1363 rows)</a:t>
             </a:r>
           </a:p>
         </p:txBody>
@@ -21482,7 +21482,7 @@
               </a:defRPr>
             </a:pPr>
             <a:r>
-              <a:t>activities: 01-data/import_templates/activity_master.csv (1363 rows)</a:t>
+              <a:t>activities: 01-data/import_templates/project_input_bundle.csv (1363 rows)</a:t>
             </a:r>
           </a:p>
           <a:p>
@@ -21494,7 +21494,7 @@
               </a:defRPr>
             </a:pPr>
             <a:r>
-              <a:t>evm: 01-data/import_templates/activity_master.csv (1363 rows)</a:t>
+              <a:t>evm: 01-data/import_templates/project_input_bundle.csv (1363 rows)</a:t>
             </a:r>
           </a:p>
           <a:p>
@@ -21958,7 +21958,7 @@
               </a:defRPr>
             </a:pPr>
             <a:r>
-              <a:t>activities: 01-data/import_templates/activity_master.csv (1363 rows)</a:t>
+              <a:t>activities: 01-data/import_templates/project_input_bundle.csv (1363 rows)</a:t>
             </a:r>
           </a:p>
         </p:txBody>
@@ -23395,7 +23395,7 @@
               </a:defRPr>
             </a:pPr>
             <a:r>
-              <a:t>activities: 01-data/import_templates/activity_master.csv (1363 rows)</a:t>
+              <a:t>activities: 01-data/import_templates/project_input_bundle.csv (1363 rows)</a:t>
             </a:r>
           </a:p>
           <a:p>
@@ -23407,7 +23407,7 @@
               </a:defRPr>
             </a:pPr>
             <a:r>
-              <a:t>evm: 01-data/import_templates/activity_master.csv (1363 rows)</a:t>
+              <a:t>evm: 01-data/import_templates/project_input_bundle.csv (1363 rows)</a:t>
             </a:r>
           </a:p>
         </p:txBody>
@@ -24850,7 +24850,7 @@
               </a:defRPr>
             </a:pPr>
             <a:r>
-              <a:t>activities: 01-data/import_templates/activity_master.csv (1363 rows)</a:t>
+              <a:t>activities: 01-data/import_templates/project_input_bundle.csv (1363 rows)</a:t>
             </a:r>
           </a:p>
           <a:p>
@@ -24862,7 +24862,7 @@
               </a:defRPr>
             </a:pPr>
             <a:r>
-              <a:t>evm: 01-data/import_templates/activity_master.csv (1363 rows)</a:t>
+              <a:t>evm: 01-data/import_templates/project_input_bundle.csv (1363 rows)</a:t>
             </a:r>
           </a:p>
           <a:p>
@@ -30430,7 +30430,7 @@
               </a:defRPr>
             </a:pPr>
             <a:r>
-              <a:t>activities: 01-data/import_templates/activity_master.csv (1363 rows)</a:t>
+              <a:t>activities: 01-data/import_templates/project_input_bundle.csv (1363 rows)</a:t>
             </a:r>
           </a:p>
           <a:p>
@@ -30442,7 +30442,7 @@
               </a:defRPr>
             </a:pPr>
             <a:r>
-              <a:t>progress: 01-data/import_templates/activity_master.csv (1363 rows)</a:t>
+              <a:t>progress: 01-data/import_templates/project_input_bundle.csv (1363 rows)</a:t>
             </a:r>
           </a:p>
         </p:txBody>
@@ -31897,7 +31897,7 @@
               </a:defRPr>
             </a:pPr>
             <a:r>
-              <a:t>activities: 01-data/import_templates/activity_master.csv (1363 rows)</a:t>
+              <a:t>activities: 01-data/import_templates/project_input_bundle.csv (1363 rows)</a:t>
             </a:r>
           </a:p>
         </p:txBody>
@@ -33780,7 +33780,7 @@
               </a:defRPr>
             </a:pPr>
             <a:r>
-              <a:t>payments: 02-delay_analysis/unified_tia_csv/08- payments.csv (8 rows)</a:t>
+              <a:t>payments: 01-data/import_templates/payments.csv (8 rows)</a:t>
             </a:r>
           </a:p>
         </p:txBody>
@@ -34834,7 +34834,7 @@
               </a:defRPr>
             </a:pPr>
             <a:r>
-              <a:t>activities: 01-data/import_templates/activity_master.csv (1363 rows)</a:t>
+              <a:t>activities: 01-data/import_templates/project_input_bundle.csv (1363 rows)</a:t>
             </a:r>
           </a:p>
         </p:txBody>
